--- a/text.pptx
+++ b/text.pptx
@@ -260,7 +260,7 @@
           <a:p>
             <a:fld id="{91A61FA3-1843-480C-BFAB-9EF8081C590C}" type="datetimeFigureOut">
               <a:rPr lang="zh-CN" altLang="en-US" smtClean="0"/>
-              <a:t>2024/7/10</a:t>
+              <a:t>2026/8/11</a:t>
             </a:fld>
             <a:endParaRPr lang="zh-CN" altLang="en-US"/>
           </a:p>
@@ -458,7 +458,7 @@
           <a:p>
             <a:fld id="{91A61FA3-1843-480C-BFAB-9EF8081C590C}" type="datetimeFigureOut">
               <a:rPr lang="zh-CN" altLang="en-US" smtClean="0"/>
-              <a:t>2024/7/10</a:t>
+              <a:t>2026/8/11</a:t>
             </a:fld>
             <a:endParaRPr lang="zh-CN" altLang="en-US"/>
           </a:p>
@@ -666,7 +666,7 @@
           <a:p>
             <a:fld id="{91A61FA3-1843-480C-BFAB-9EF8081C590C}" type="datetimeFigureOut">
               <a:rPr lang="zh-CN" altLang="en-US" smtClean="0"/>
-              <a:t>2024/7/10</a:t>
+              <a:t>2026/8/11</a:t>
             </a:fld>
             <a:endParaRPr lang="zh-CN" altLang="en-US"/>
           </a:p>
@@ -864,7 +864,7 @@
           <a:p>
             <a:fld id="{91A61FA3-1843-480C-BFAB-9EF8081C590C}" type="datetimeFigureOut">
               <a:rPr lang="zh-CN" altLang="en-US" smtClean="0"/>
-              <a:t>2024/7/10</a:t>
+              <a:t>2026/8/11</a:t>
             </a:fld>
             <a:endParaRPr lang="zh-CN" altLang="en-US"/>
           </a:p>
@@ -1139,7 +1139,7 @@
           <a:p>
             <a:fld id="{91A61FA3-1843-480C-BFAB-9EF8081C590C}" type="datetimeFigureOut">
               <a:rPr lang="zh-CN" altLang="en-US" smtClean="0"/>
-              <a:t>2024/7/10</a:t>
+              <a:t>2026/8/11</a:t>
             </a:fld>
             <a:endParaRPr lang="zh-CN" altLang="en-US"/>
           </a:p>
@@ -1404,7 +1404,7 @@
           <a:p>
             <a:fld id="{91A61FA3-1843-480C-BFAB-9EF8081C590C}" type="datetimeFigureOut">
               <a:rPr lang="zh-CN" altLang="en-US" smtClean="0"/>
-              <a:t>2024/7/10</a:t>
+              <a:t>2026/8/11</a:t>
             </a:fld>
             <a:endParaRPr lang="zh-CN" altLang="en-US"/>
           </a:p>
@@ -1816,7 +1816,7 @@
           <a:p>
             <a:fld id="{91A61FA3-1843-480C-BFAB-9EF8081C590C}" type="datetimeFigureOut">
               <a:rPr lang="zh-CN" altLang="en-US" smtClean="0"/>
-              <a:t>2024/7/10</a:t>
+              <a:t>2026/8/11</a:t>
             </a:fld>
             <a:endParaRPr lang="zh-CN" altLang="en-US"/>
           </a:p>
@@ -1957,7 +1957,7 @@
           <a:p>
             <a:fld id="{91A61FA3-1843-480C-BFAB-9EF8081C590C}" type="datetimeFigureOut">
               <a:rPr lang="zh-CN" altLang="en-US" smtClean="0"/>
-              <a:t>2024/7/10</a:t>
+              <a:t>2026/8/11</a:t>
             </a:fld>
             <a:endParaRPr lang="zh-CN" altLang="en-US"/>
           </a:p>
@@ -2070,7 +2070,7 @@
           <a:p>
             <a:fld id="{91A61FA3-1843-480C-BFAB-9EF8081C590C}" type="datetimeFigureOut">
               <a:rPr lang="zh-CN" altLang="en-US" smtClean="0"/>
-              <a:t>2024/7/10</a:t>
+              <a:t>2026/8/11</a:t>
             </a:fld>
             <a:endParaRPr lang="zh-CN" altLang="en-US"/>
           </a:p>
@@ -2381,7 +2381,7 @@
           <a:p>
             <a:fld id="{91A61FA3-1843-480C-BFAB-9EF8081C590C}" type="datetimeFigureOut">
               <a:rPr lang="zh-CN" altLang="en-US" smtClean="0"/>
-              <a:t>2024/7/10</a:t>
+              <a:t>2026/8/11</a:t>
             </a:fld>
             <a:endParaRPr lang="zh-CN" altLang="en-US"/>
           </a:p>
@@ -2669,7 +2669,7 @@
           <a:p>
             <a:fld id="{91A61FA3-1843-480C-BFAB-9EF8081C590C}" type="datetimeFigureOut">
               <a:rPr lang="zh-CN" altLang="en-US" smtClean="0"/>
-              <a:t>2024/7/10</a:t>
+              <a:t>2026/8/11</a:t>
             </a:fld>
             <a:endParaRPr lang="zh-CN" altLang="en-US"/>
           </a:p>
@@ -2910,7 +2910,7 @@
           <a:p>
             <a:fld id="{91A61FA3-1843-480C-BFAB-9EF8081C590C}" type="datetimeFigureOut">
               <a:rPr lang="zh-CN" altLang="en-US" smtClean="0"/>
-              <a:t>2024/7/10</a:t>
+              <a:t>2026/8/11</a:t>
             </a:fld>
             <a:endParaRPr lang="zh-CN" altLang="en-US"/>
           </a:p>
@@ -3360,7 +3360,7 @@
                 <a:latin typeface="仿宋" panose="02010609060101010101" pitchFamily="49" charset="-122"/>
                 <a:ea typeface="仿宋" panose="02010609060101010101" pitchFamily="49" charset="-122"/>
               </a:rPr>
-              <a:t>杭州市余杭区爱善公益服务中心</a:t>
+              <a:t>杭州市余杭区中泰街道绿叶公益服务中心</a:t>
             </a:r>
           </a:p>
         </p:txBody>

--- a/text.pptx
+++ b/text.pptx
@@ -3365,6 +3365,42 @@
           </a:p>
         </p:txBody>
       </p:sp>
+      <p:pic>
+        <p:nvPicPr>
+          <p:cNvPr id="3" name="图片 2">
+            <a:extLst>
+              <a:ext uri="{FF2B5EF4-FFF2-40B4-BE49-F238E27FC236}">
+                <a16:creationId xmlns:a16="http://schemas.microsoft.com/office/drawing/2014/main" id="{ED7DD211-7EB2-90C0-DB97-3CC1489AE04A}"/>
+              </a:ext>
+            </a:extLst>
+          </p:cNvPr>
+          <p:cNvPicPr>
+            <a:picLocks noChangeAspect="1"/>
+          </p:cNvPicPr>
+          <p:nvPr/>
+        </p:nvPicPr>
+        <p:blipFill>
+          <a:blip r:embed="rId2">
+            <a:extLst>
+              <a:ext uri="{28A0092B-C50C-407E-A947-70E740481C1C}">
+                <a14:useLocalDpi xmlns:a14="http://schemas.microsoft.com/office/drawing/2010/main" val="0"/>
+              </a:ext>
+            </a:extLst>
+          </a:blip>
+          <a:stretch>
+            <a:fillRect/>
+          </a:stretch>
+        </p:blipFill>
+        <p:spPr>
+          <a:xfrm>
+            <a:off x="1038448" y="2924747"/>
+            <a:ext cx="1078992" cy="1008505"/>
+          </a:xfrm>
+          <a:prstGeom prst="rect">
+            <a:avLst/>
+          </a:prstGeom>
+        </p:spPr>
+      </p:pic>
     </p:spTree>
     <p:extLst>
       <p:ext uri="{BB962C8B-B14F-4D97-AF65-F5344CB8AC3E}">
